--- a/slides-en/02-professional-skills.pptx
+++ b/slides-en/02-professional-skills.pptx
@@ -608,53 +608,53 @@
           <a:lstStyle/>
           <a:p>
             <a:r>
-              <a:t>ĐẶT CÂU HỎI (3 phút)</a:t>
-            </a:r>
-          </a:p>
-          <a:p>
-            <a:r>
-              <a:t>• Phân biệt câu hỏi ĐÓNG (chốt thông tin) và MỞ (khám phá nhu cầu).</a:t>
-            </a:r>
-          </a:p>
-          <a:p>
-            <a:r>
-              <a:t>• Nhấn: bán hàng giỏi là HỎI giỏi, không phải NÓI giỏi.</a:t>
-            </a:r>
-          </a:p>
-          <a:p>
-            <a:r>
-              <a:t>• Lỗi phải tránh: hỏi dồn nhiều câu một lúc; hỏi mớm cung; hỏi xong không chờ mà nói tiếp.</a:t>
-            </a:r>
-          </a:p>
-          <a:p>
-            <a:r>
-              <a:t>• LUẬT VÀNG: hỏi xong thì IM LẶNG chờ câu trả lời.</a:t>
+              <a:t>ASKING QUESTIONS (3 minutes)</a:t>
+            </a:r>
+          </a:p>
+          <a:p>
+            <a:r>
+              <a:t>• Separate CLOSED questions (pinning down facts) from OPEN ones (uncovering needs).</a:t>
+            </a:r>
+          </a:p>
+          <a:p>
+            <a:r>
+              <a:t>• Press: good selling is good ASKING, not good TALKING.</a:t>
+            </a:r>
+          </a:p>
+          <a:p>
+            <a:r>
+              <a:t>• Mistakes to avoid: firing several questions at once; leading the witness; asking and then talking on without waiting.</a:t>
+            </a:r>
+          </a:p>
+          <a:p>
+            <a:r>
+              <a:t>• THE GOLDEN RULE: ask, then BE QUIET and wait for the answer.</a:t>
             </a:r>
           </a:p>
           <a:p/>
           <a:p>
             <a:r>
-              <a:t>NÓI ĐỦ Ý (phần đã rút khỏi slide)</a:t>
-            </a:r>
-          </a:p>
-          <a:p>
-            <a:r>
-              <a:t>• Câu hỏi đóng, ví dụ: “Anh đã nhận được báo giá chưa?”</a:t>
-            </a:r>
-          </a:p>
-          <a:p>
-            <a:r>
-              <a:t>• Câu hỏi mở khơi người đối diện chia sẻ.</a:t>
-            </a:r>
-          </a:p>
-          <a:p>
-            <a:r>
-              <a:t>• Thăm dò – đào sâu: “Cụ thể là…?”, “Anh có thể cho ví dụ?”</a:t>
-            </a:r>
-          </a:p>
-          <a:p>
-            <a:r>
-              <a:t>• Lưu ý: tránh câu hỏi dồn ép, mớm cung; hỏi xong đừng tự trả lời thay.</a:t>
+              <a:t>THE FULL VERSION (moved off the slide)</a:t>
+            </a:r>
+          </a:p>
+          <a:p>
+            <a:r>
+              <a:t>• A closed question, for example: “Have you received the quotation?”</a:t>
+            </a:r>
+          </a:p>
+          <a:p>
+            <a:r>
+              <a:t>• An open question invites the other person to talk.</a:t>
+            </a:r>
+          </a:p>
+          <a:p>
+            <a:r>
+              <a:t>• Probing and digging: “Specifically…?”, “Could you give me an example?”</a:t>
+            </a:r>
+          </a:p>
+          <a:p>
+            <a:r>
+              <a:t>• Watch out for: pressing, leading questions; and don't answer your own question.</a:t>
             </a:r>
           </a:p>
         </p:txBody>
@@ -740,48 +740,48 @@
           <a:lstStyle/>
           <a:p>
             <a:r>
-              <a:t>ĐIỆN THOẠI — GỌI ĐI (3 phút)</a:t>
-            </a:r>
-          </a:p>
-          <a:p>
-            <a:r>
-              <a:t>• 4 bước, nhấn bước 1 CHUẨN BỊ TRƯỚC: mục đích, nội dung, giấy bút, chọn thời điểm.</a:t>
-            </a:r>
-          </a:p>
-          <a:p>
-            <a:r>
-              <a:t>• Làm mẫu câu mở đầu chuẩn: "Dạ em chào anh, em là… gọi từ công ty… Không biết bây giờ anh có tiện nghe máy khoảng 5 phút không ạ?"</a:t>
-            </a:r>
-          </a:p>
-          <a:p>
-            <a:r>
-              <a:t>• Kết thúc: TÓM TẮT LẠI thời gian, địa điểm, việc cần làm trước khi cúp máy.</a:t>
+              <a:t>THE TELEPHONE — MAKING THE CALL (3 minutes)</a:t>
+            </a:r>
+          </a:p>
+          <a:p>
+            <a:r>
+              <a:t>• Four steps; press step 1, PREPARE FIRST: your purpose, your points, pen and paper, the right moment.</a:t>
+            </a:r>
+          </a:p>
+          <a:p>
+            <a:r>
+              <a:t>• Model the standard opening: "Good morning, this is… calling from…. Is now a convenient moment to talk for about five minutes?"</a:t>
+            </a:r>
+          </a:p>
+          <a:p>
+            <a:r>
+              <a:t>• Closing: SUMMARISE the time, the place and what happens next before you hang up.</a:t>
             </a:r>
           </a:p>
           <a:p/>
           <a:p>
             <a:r>
-              <a:t>NÓI ĐỦ Ý (phần đã rút khỏi slide)</a:t>
-            </a:r>
-          </a:p>
-          <a:p>
-            <a:r>
-              <a:t>• Chuẩn bị: tránh gọi sớm quá, muộn quá, hoặc giờ nghỉ trưa.</a:t>
-            </a:r>
-          </a:p>
-          <a:p>
-            <a:r>
-              <a:t>• Mở đầu mẫu: “Em chào anh, em là… từ công ty… Anh có tiện nghe máy 5 phút không ạ?”</a:t>
-            </a:r>
-          </a:p>
-          <a:p>
-            <a:r>
-              <a:t>• Trình bày: nói rõ ràng; tóm tắt lại thỏa thuận gồm thời gian, địa điểm, việc cần làm.</a:t>
-            </a:r>
-          </a:p>
-          <a:p>
-            <a:r>
-              <a:t>• Kết thúc: để người có vị thế cao hơn hoặc khách hàng gác máy trước.</a:t>
+              <a:t>THE FULL VERSION (moved off the slide)</a:t>
+            </a:r>
+          </a:p>
+          <a:p>
+            <a:r>
+              <a:t>• Preparation: avoid calling too early, too late, or over the lunch break.</a:t>
+            </a:r>
+          </a:p>
+          <a:p>
+            <a:r>
+              <a:t>• A model opening: “Good morning, this is… from…. Do you have five minutes?”</a:t>
+            </a:r>
+          </a:p>
+          <a:p>
+            <a:r>
+              <a:t>• The body: speak clearly; read back the agreement — time, place, what each side will do.</a:t>
+            </a:r>
+          </a:p>
+          <a:p>
+            <a:r>
+              <a:t>• Closing: let the more senior person, or the customer, hang up first.</a:t>
             </a:r>
           </a:p>
         </p:txBody>
@@ -867,48 +867,48 @@
           <a:lstStyle/>
           <a:p>
             <a:r>
-              <a:t>ĐIỆN THOẠI — NGHE MÁY (3 phút)</a:t>
-            </a:r>
-          </a:p>
-          <a:p>
-            <a:r>
-              <a:t>• Nhấc trong 3 hồi chuông; chào và XƯNG DANH ĐƠN VỊ.</a:t>
-            </a:r>
-          </a:p>
-          <a:p>
-            <a:r>
-              <a:t>• Mẹo: MỈM CƯỜI khi nói — người nghe cảm nhận được qua giọng.</a:t>
-            </a:r>
-          </a:p>
-          <a:p>
-            <a:r>
-              <a:t>• Ghi lời nhắn đủ 4 thông tin: ai gọi – việc gì – số liên lạc – hẹn phản hồi khi nào.</a:t>
-            </a:r>
-          </a:p>
-          <a:p>
-            <a:r>
-              <a:t>• Văn hóa công sở: không nghe điện riêng khi đang tiếp khách hoặc đang họp.</a:t>
+              <a:t>THE TELEPHONE — TAKING THE CALL (3 minutes)</a:t>
+            </a:r>
+          </a:p>
+          <a:p>
+            <a:r>
+              <a:t>• Pick up within three rings; greet the caller and NAME YOUR ORGANISATION.</a:t>
+            </a:r>
+          </a:p>
+          <a:p>
+            <a:r>
+              <a:t>• A trick: SMILE while you speak — the caller hears it in your voice.</a:t>
+            </a:r>
+          </a:p>
+          <a:p>
+            <a:r>
+              <a:t>• A message needs four things: who called – about what – their number – when you will get back to them.</a:t>
+            </a:r>
+          </a:p>
+          <a:p>
+            <a:r>
+              <a:t>• Office culture: don't take personal calls while you have a visitor or are in a meeting.</a:t>
             </a:r>
           </a:p>
           <a:p/>
           <a:p>
             <a:r>
-              <a:t>NÓI ĐỦ Ý (phần đã rút khỏi slide)</a:t>
-            </a:r>
-          </a:p>
-          <a:p>
-            <a:r>
-              <a:t>• Giọng tươi — người gọi “nghe thấy” nụ cười của bạn; ghi chú và NHẮC LẠI lời nhắn.</a:t>
-            </a:r>
-          </a:p>
-          <a:p>
-            <a:r>
-              <a:t>• Lời nhắn phải chuyển đầy đủ và đúng hạn.</a:t>
-            </a:r>
-          </a:p>
-          <a:p>
-            <a:r>
-              <a:t>• Nhắn tin / Zalo công việc cũng cần đúng chuẩn mực như email.</a:t>
+              <a:t>THE FULL VERSION (moved off the slide)</a:t>
+            </a:r>
+          </a:p>
+          <a:p>
+            <a:r>
+              <a:t>• A bright voice — the caller “hears” your smile; write it down and READ IT BACK.</a:t>
+            </a:r>
+          </a:p>
+          <a:p>
+            <a:r>
+              <a:t>• A message must be passed on in full and in time.</a:t>
+            </a:r>
+          </a:p>
+          <a:p>
+            <a:r>
+              <a:t>• Work messages on Zalo or by text hold to the same standards as email.</a:t>
             </a:r>
           </a:p>
         </p:txBody>
@@ -994,53 +994,53 @@
           <a:lstStyle/>
           <a:p>
             <a:r>
-              <a:t>HOẠT ĐỘNG THỰC HÀNH (15 phút)</a:t>
-            </a:r>
-          </a:p>
-          <a:p>
-            <a:r>
-              <a:t>• Chia cặp, mỗi cặp bốc một tình huống.</a:t>
-            </a:r>
-          </a:p>
-          <a:p>
-            <a:r>
-              <a:t>• 5 phút chuẩn bị, mỗi cặp diễn 2 phút trước lớp, cả lớp nhận xét theo tiêu chí đã học.</a:t>
-            </a:r>
-          </a:p>
-          <a:p>
-            <a:r>
-              <a:t>• Cô quan sát và ghi lại 2–3 lỗi phổ biến để chốt cuối buổi.</a:t>
-            </a:r>
-          </a:p>
-          <a:p>
-            <a:r>
-              <a:t>• Khen công khai bạn làm tốt; góp ý chung cho cả lớp, không nêu tên bạn làm chưa tốt.</a:t>
+              <a:t>PRACTICAL ACTIVITY (15 minutes)</a:t>
+            </a:r>
+          </a:p>
+          <a:p>
+            <a:r>
+              <a:t>• Pairs; each pair draws a situation.</a:t>
+            </a:r>
+          </a:p>
+          <a:p>
+            <a:r>
+              <a:t>• 5 minutes to prepare, 2 minutes to perform in front of the class, then the class comments against the criteria just taught.</a:t>
+            </a:r>
+          </a:p>
+          <a:p>
+            <a:r>
+              <a:t>• Watch and note 2–3 common mistakes to land at the end of the session.</a:t>
+            </a:r>
+          </a:p>
+          <a:p>
+            <a:r>
+              <a:t>• Praise good work by name; give the criticism to the room as a whole, never naming who fell short.</a:t>
             </a:r>
           </a:p>
           <a:p/>
           <a:p>
             <a:r>
-              <a:t>NÓI ĐỦ Ý (phần đã rút khỏi slide)</a:t>
-            </a:r>
-          </a:p>
-          <a:p>
-            <a:r>
-              <a:t>• Tình huống (a): gọi điện lần đầu cho khách hàng tiềm năng để hẹn gặp giới thiệu sản phẩm.</a:t>
-            </a:r>
-          </a:p>
-          <a:p>
-            <a:r>
-              <a:t>• Tình huống (b): gọi điện xử lý việc giao hàng trễ cho khách đang khó chịu.</a:t>
-            </a:r>
-          </a:p>
-          <a:p>
-            <a:r>
-              <a:t>• Đóng vai: một bạn vai nhân viên, một bạn vai khách hàng.</a:t>
-            </a:r>
-          </a:p>
-          <a:p>
-            <a:r>
-              <a:t>• Thuyết trình: chủ đề đã chuẩn bị ở nhà; lớp nhận xét cả ngôn ngữ cơ thể.</a:t>
+              <a:t>THE FULL VERSION (moved off the slide)</a:t>
+            </a:r>
+          </a:p>
+          <a:p>
+            <a:r>
+              <a:t>• Situation (a): a first call to a prospective customer, asking for a meeting to present the product.</a:t>
+            </a:r>
+          </a:p>
+          <a:p>
+            <a:r>
+              <a:t>• Situation (b): a call handling a late delivery for an unhappy customer.</a:t>
+            </a:r>
+          </a:p>
+          <a:p>
+            <a:r>
+              <a:t>• Role play: one plays the employee, one the customer.</a:t>
+            </a:r>
+          </a:p>
+          <a:p>
+            <a:r>
+              <a:t>• Presentation: the topic prepared at home; the class comments on body language too.</a:t>
             </a:r>
           </a:p>
         </p:txBody>
@@ -1126,17 +1126,17 @@
           <a:lstStyle/>
           <a:p>
             <a:r>
-              <a:t>TỔNG KẾT (2 phút)</a:t>
-            </a:r>
-          </a:p>
-          <a:p>
-            <a:r>
-              <a:t>• Nhắc lại quy tắc 4×20 và 5 mức lắng nghe — gọi sinh viên nhắc.</a:t>
-            </a:r>
-          </a:p>
-          <a:p>
-            <a:r>
-              <a:t>• Giao việc: 40 câu trắc nghiệm Chương 2; chuẩn bị đề tài thuyết trình nhóm.</a:t>
+              <a:t>SUMMARY (2 minutes)</a:t>
+            </a:r>
+          </a:p>
+          <a:p>
+            <a:r>
+              <a:t>• Recap the 4×20 rule and the 5 levels of listening — have a student say them back.</a:t>
+            </a:r>
+          </a:p>
+          <a:p>
+            <a:r>
+              <a:t>• Set the work: the 40 multiple-choice questions for Chapter 2; prepare a topic for the group presentation.</a:t>
             </a:r>
           </a:p>
         </p:txBody>
@@ -1222,7 +1222,7 @@
           <a:lstStyle/>
           <a:p>
             <a:r>
-              <a:t>ÔN TẬP (1 phút) — sinh viên tự làm ở nhà.</a:t>
+              <a:t>REVISION (1 minute) — students work through this at home.</a:t>
             </a:r>
           </a:p>
         </p:txBody>
@@ -1308,7 +1308,7 @@
           <a:lstStyle/>
           <a:p>
             <a:r>
-              <a:t>TÀI LIỆU (1 phút) — nhắc đọc trước phần giao tiếp nội bộ cho buổi sau.</a:t>
+              <a:t>READING (1 minute) — remind them to read the section on internal communication before the next session.</a:t>
             </a:r>
           </a:p>
         </p:txBody>
@@ -1394,22 +1394,22 @@
           <a:lstStyle/>
           <a:p>
             <a:r>
-              <a:t>QUY TẮC 4×20 (2 phút)</a:t>
-            </a:r>
-          </a:p>
-          <a:p>
-            <a:r>
-              <a:t>• Slide này để sinh viên CHỤP LẠI.</a:t>
-            </a:r>
-          </a:p>
-          <a:p>
-            <a:r>
-              <a:t>• Đọc từng con số, mỗi con số cho một ví dụ 1 câu.</a:t>
-            </a:r>
-          </a:p>
-          <a:p>
-            <a:r>
-              <a:t>• Hỏi: "Trong 4 cửa ải này, bạn tự tin nhất và yếu nhất ở đâu?"''</a:t>
+              <a:t>THE 4×20 RULE (2 minutes)</a:t>
+            </a:r>
+          </a:p>
+          <a:p>
+            <a:r>
+              <a:t>• This slide is for students to PHOTOGRAPH.</a:t>
+            </a:r>
+          </a:p>
+          <a:p>
+            <a:r>
+              <a:t>• Read each number, one one-sentence example each.</a:t>
+            </a:r>
+          </a:p>
+          <a:p>
+            <a:r>
+              <a:t>• Ask: "Of these four gates, which are you most and least confident at?"''</a:t>
             </a:r>
           </a:p>
         </p:txBody>
@@ -1479,48 +1479,48 @@
           <a:lstStyle/>
           <a:p>
             <a:r>
-              <a:t>QUY TẮC 4×20 (4 phút)</a:t>
-            </a:r>
-          </a:p>
-          <a:p>
-            <a:r>
-              <a:t>• Hỏi trước khi giảng: "Theo bạn, người ta mất bao lâu để hình thành ấn tượng về mình?"</a:t>
-            </a:r>
-          </a:p>
-          <a:p>
-            <a:r>
-              <a:t>• Đi qua 4 con số 20, mỗi con số cho một ví dụ ngắn.</a:t>
-            </a:r>
-          </a:p>
-          <a:p>
-            <a:r>
-              <a:t>• DIỄN THỬ: cô bước vào lớp hai lần — lần cúi mặt bước nhanh, lần ngẩng cao vai mở mỉm cười. Hỏi lớp thấy khác gì.</a:t>
-            </a:r>
-          </a:p>
-          <a:p>
-            <a:r>
-              <a:t>• CHỐT: ấn tượng ban đầu ĐƯỢC CHUẨN BỊ, không phải may mắn.</a:t>
+              <a:t>THE 4×20 RULE (4 minutes)</a:t>
+            </a:r>
+          </a:p>
+          <a:p>
+            <a:r>
+              <a:t>• Ask before you teach: "How long do you think it takes someone to form an impression of you?"</a:t>
+            </a:r>
+          </a:p>
+          <a:p>
+            <a:r>
+              <a:t>• Walk the four twenties, one short example each.</a:t>
+            </a:r>
+          </a:p>
+          <a:p>
+            <a:r>
+              <a:t>• DEMONSTRATE: walk into the room twice — once head down and hurried, once head up, shoulders open, smiling. Ask the class what changed.</a:t>
+            </a:r>
+          </a:p>
+          <a:p>
+            <a:r>
+              <a:t>• LAND IT: a first impression is PREPARED, not lucky.</a:t>
             </a:r>
           </a:p>
           <a:p/>
           <a:p>
             <a:r>
-              <a:t>NÓI ĐỦ Ý (phần đã rút khỏi slide)</a:t>
-            </a:r>
-          </a:p>
-          <a:p>
-            <a:r>
-              <a:t>• Vài giây đầu: não bộ hình thành đánh giá gần như tức thì từ ngoại hình, thần thái, cách chào — và ấn tượng đầu rất khó đảo ngược về sau.</a:t>
-            </a:r>
-          </a:p>
-          <a:p>
-            <a:r>
-              <a:t>• Quy tắc 4×20 đầy đủ: 20 giây đầu tiên • 20 bước chân đầu tiên • 20 cm gương mặt (ánh mắt, nụ cười) • 20 từ đầu tiên — chuẩn bị kỹ cả bốn.</a:t>
-            </a:r>
-          </a:p>
-          <a:p>
-            <a:r>
-              <a:t>• Ba trụ cột: trang phục phù hợp bối cảnh VÀ vị trí; thần thái tự tin, thân thiện; lời chào – giới thiệu rõ ràng, đúng nghi thức.</a:t>
+              <a:t>THE FULL VERSION (moved off the slide)</a:t>
+            </a:r>
+          </a:p>
+          <a:p>
+            <a:r>
+              <a:t>• The first few seconds: the brain forms a judgement almost instantly from appearance, bearing and greeting — and a first impression is very hard to reverse later.</a:t>
+            </a:r>
+          </a:p>
+          <a:p>
+            <a:r>
+              <a:t>• The 4×20 rule in full: the first 20 seconds • the first 20 steps • the 20 cm of your face (eyes, smile) • the first 20 words — prepare all four properly.</a:t>
+            </a:r>
+          </a:p>
+          <a:p>
+            <a:r>
+              <a:t>• Three pillars: dress that fits the setting AND the position; a bearing that is confident and friendly; a greeting and introduction that are clear and correctly formed.</a:t>
             </a:r>
           </a:p>
         </p:txBody>
@@ -1590,7 +1590,7 @@
           <a:lstStyle/>
           <a:p>
             <a:r>
-              <a:t>CHUYỂN MỤC (30 giây) — nhắc bài thuyết trình nhóm cuối kỳ chấm theo phần này.</a:t>
+              <a:t>SECTION CHANGE (30 seconds) — remind them the end-of-term group presentation is marked against this section.</a:t>
             </a:r>
           </a:p>
         </p:txBody>
@@ -1660,12 +1660,12 @@
           <a:lstStyle/>
           <a:p>
             <a:r>
-              <a:t>MỤC TIÊU (1 phút)</a:t>
-            </a:r>
-          </a:p>
-          <a:p>
-            <a:r>
-              <a:t>• Đọc lướt. Nhấn: chương này THỰC HÀNH nhiều hơn lý thuyết.</a:t>
+              <a:t>OBJECTIVES (1 minute)</a:t>
+            </a:r>
+          </a:p>
+          <a:p>
+            <a:r>
+              <a:t>• Skim. Press the point: this chapter is more PRACTICE than theory.</a:t>
             </a:r>
           </a:p>
         </p:txBody>
@@ -1751,7 +1751,7 @@
           <a:lstStyle/>
           <a:p>
             <a:r>
-              <a:t>CHUYỂN MỤC (30 giây).</a:t>
+              <a:t>SECTION CHANGE (30 seconds).</a:t>
             </a:r>
           </a:p>
         </p:txBody>
@@ -1821,12 +1821,12 @@
           <a:lstStyle/>
           <a:p>
             <a:r>
-              <a:t>LỘ TRÌNH (1 phút)</a:t>
-            </a:r>
-          </a:p>
-          <a:p>
-            <a:r>
-              <a:t>• 4 kỹ năng, mỗi kỹ năng khoảng 15 phút gồm cả thực hành.</a:t>
+              <a:t>THE MAP (1 minute)</a:t>
+            </a:r>
+          </a:p>
+          <a:p>
+            <a:r>
+              <a:t>• Four skills, roughly 15 minutes each including the hands-on part.</a:t>
             </a:r>
           </a:p>
         </p:txBody>
@@ -2000,53 +2000,53 @@
           <a:lstStyle/>
           <a:p>
             <a:r>
-              <a:t>NGHI THỨC (4 phút) — THỰC HÀNH NGAY</a:t>
-            </a:r>
-          </a:p>
-          <a:p>
-            <a:r>
-              <a:t>• Cho cả lớp đứng dậy, quay sang bạn bên cạnh THỰC HÀNH BẮT TAY: đứng dậy, nhìn mắt, siết vừa, 2–3 giây.</a:t>
-            </a:r>
-          </a:p>
-          <a:p>
-            <a:r>
-              <a:t>• Sửa lỗi tại chỗ: bắt tay hờ, bắt tay quá chặt, nhìn chỗ khác.</a:t>
-            </a:r>
-          </a:p>
-          <a:p>
-            <a:r>
-              <a:t>• Danh thiếp: làm mẫu trao và nhận bằng hai tay, ĐỌC QUA rồi mới cất — nhấn: cất ngay là bất lịch sự.</a:t>
-            </a:r>
-          </a:p>
-          <a:p>
-            <a:r>
-              <a:t>• Mẹo nhớ thứ tự giới thiệu: giới thiệu người ÍT quan trọng VỚI người quan trọng hơn.</a:t>
+              <a:t>ETIQUETTE (4 minutes) — HANDS-ON NOW</a:t>
+            </a:r>
+          </a:p>
+          <a:p>
+            <a:r>
+              <a:t>• Get the whole class on their feet, turn to the person beside them and PRACTISE THE HANDSHAKE: stand up, meet their eyes, firm grip, 2–3 seconds.</a:t>
+            </a:r>
+          </a:p>
+          <a:p>
+            <a:r>
+              <a:t>• Correct on the spot: the limp handshake, the crushing handshake, looking elsewhere.</a:t>
+            </a:r>
+          </a:p>
+          <a:p>
+            <a:r>
+              <a:t>• Business cards: demonstrate giving and receiving with both hands, READ IT before putting it away — press the point: pocketing it straight away is rude.</a:t>
+            </a:r>
+          </a:p>
+          <a:p>
+            <a:r>
+              <a:t>• A way to remember the order of introductions: introduce the LESS senior person TO the more senior one.</a:t>
             </a:r>
           </a:p>
           <a:p/>
           <a:p>
             <a:r>
-              <a:t>NÓI ĐỦ Ý (phần đã rút khỏi slide)</a:t>
-            </a:r>
-          </a:p>
-          <a:p>
-            <a:r>
-              <a:t>• Chào hỏi: người nhỏ chào người lớn, nhân viên chào cấp trên trước; nói rõ tên – chức danh – đơn vị.</a:t>
-            </a:r>
-          </a:p>
-          <a:p>
-            <a:r>
-              <a:t>• Bắt tay: người có vị thế cao hơn hoặc phụ nữ chủ động đưa tay trước; không bắt quá lỏng, quá chặt, quá lâu.</a:t>
-            </a:r>
-          </a:p>
-          <a:p>
-            <a:r>
-              <a:t>• Danh thiếp: đừng nhét ngay vào túi quần — đó là chỗ sinh viên hay mắc nhất.</a:t>
-            </a:r>
-          </a:p>
-          <a:p>
-            <a:r>
-              <a:t>• Không gian chung: thang máy, phòng họp, bàn làm việc mở — không nói to chuyện riêng.</a:t>
+              <a:t>THE FULL VERSION (moved off the slide)</a:t>
+            </a:r>
+          </a:p>
+          <a:p>
+            <a:r>
+              <a:t>• Greeting: the younger greets the elder, staff greet their superiors first; state your name, title and unit clearly.</a:t>
+            </a:r>
+          </a:p>
+          <a:p>
+            <a:r>
+              <a:t>• Handshake: the more senior person, or the woman, offers a hand first; not too loose, too hard, or too long.</a:t>
+            </a:r>
+          </a:p>
+          <a:p>
+            <a:r>
+              <a:t>• Business cards: don't stuff it into your trouser pocket — this is where students slip most often.</a:t>
+            </a:r>
+          </a:p>
+          <a:p>
+            <a:r>
+              <a:t>• Shared spaces: lifts, meeting rooms, open-plan desks — no loud private conversation.</a:t>
             </a:r>
           </a:p>
         </p:txBody>
@@ -2132,22 +2132,22 @@
           <a:lstStyle/>
           <a:p>
             <a:r>
-              <a:t>CHUẨN BỊ THUYẾT TRÌNH (3 phút)</a:t>
-            </a:r>
-          </a:p>
-          <a:p>
-            <a:r>
-              <a:t>• Nhấn bước 1: PHÂN TÍCH NGƯỜI NGHE — đa số sinh viên bỏ qua bước này.</a:t>
-            </a:r>
-          </a:p>
-          <a:p>
-            <a:r>
-              <a:t>• Quy tắc slide: ÍT CHỮ NHIỀU HÌNH. Chỉ vào chính slide đang chiếu làm ví dụ.</a:t>
-            </a:r>
-          </a:p>
-          <a:p>
-            <a:r>
-              <a:t>• Nhắc: bài thuyết trình nhóm cuối kỳ sẽ chấm theo đúng 5 bước này.</a:t>
+              <a:t>PREPARING A PRESENTATION (3 minutes)</a:t>
+            </a:r>
+          </a:p>
+          <a:p>
+            <a:r>
+              <a:t>• Press step 1: ANALYSE YOUR AUDIENCE — most students skip it.</a:t>
+            </a:r>
+          </a:p>
+          <a:p>
+            <a:r>
+              <a:t>• The slide rule: FEW WORDS, MORE PICTURES. Point at the slide on screen as the example.</a:t>
+            </a:r>
+          </a:p>
+          <a:p>
+            <a:r>
+              <a:t>• Remind them: the end-of-term group presentation is marked against exactly these five steps.</a:t>
             </a:r>
           </a:p>
         </p:txBody>
@@ -2233,43 +2233,43 @@
           <a:lstStyle/>
           <a:p>
             <a:r>
-              <a:t>CẤU TRÚC (3 phút)</a:t>
-            </a:r>
-          </a:p>
-          <a:p>
-            <a:r>
-              <a:t>• Tỷ lệ 10–15 / 70–80 / 10–15%.</a:t>
-            </a:r>
-          </a:p>
-          <a:p>
-            <a:r>
-              <a:t>• Nhấn: TỐI ĐA 3 Ý CHÍNH. Nhiều hơn thì người nghe không nhớ nổi.</a:t>
-            </a:r>
-          </a:p>
-          <a:p>
-            <a:r>
-              <a:t>• Mở đầu bằng câu hỏi / con số / câu chuyện — cho lớp thử nghĩ 1 câu mở đầu cho đề tài tự chọn.</a:t>
+              <a:t>STRUCTURE (3 minutes)</a:t>
+            </a:r>
+          </a:p>
+          <a:p>
+            <a:r>
+              <a:t>• The 10–15 / 70–80 / 10–15% split.</a:t>
+            </a:r>
+          </a:p>
+          <a:p>
+            <a:r>
+              <a:t>• Press: AT MOST 3 MAIN POINTS. Any more and the audience remembers none of them.</a:t>
+            </a:r>
+          </a:p>
+          <a:p>
+            <a:r>
+              <a:t>• Open with a question, a number or a story — have the class try one opening line for a topic of their choice.</a:t>
             </a:r>
           </a:p>
           <a:p/>
           <a:p>
             <a:r>
-              <a:t>NÓI ĐỦ Ý (phần đã rút khỏi slide)</a:t>
-            </a:r>
-          </a:p>
-          <a:p>
-            <a:r>
-              <a:t>• Mở đầu 10–15%: câu hỏi gây tò mò, con số ấn tượng, hoặc câu chuyện ngắn; giới thiệu bản thân rồi cho người nghe biết lộ trình bài nói.</a:t>
-            </a:r>
-          </a:p>
-          <a:p>
-            <a:r>
-              <a:t>• Thân bài 70–80%: tối đa BA ý chính; mỗi ý có câu chuyển ý rõ ràng.</a:t>
-            </a:r>
-          </a:p>
-          <a:p>
-            <a:r>
-              <a:t>• Kết luận 10–15%: đọng lại MỘT điều; chuẩn bị sẵn phần hỏi – đáp.</a:t>
+              <a:t>THE FULL VERSION (moved off the slide)</a:t>
+            </a:r>
+          </a:p>
+          <a:p>
+            <a:r>
+              <a:t>• Opening 10–15%: a question that intrigues, a striking number, or a short story; introduce yourself, then tell the audience where the talk is going.</a:t>
+            </a:r>
+          </a:p>
+          <a:p>
+            <a:r>
+              <a:t>• Body 70–80%: THREE main points at most; each with a clear bridge into the next.</a:t>
+            </a:r>
+          </a:p>
+          <a:p>
+            <a:r>
+              <a:t>• Conclusion 10–15%: leave ONE thing behind; have your question-and-answer ready.</a:t>
             </a:r>
           </a:p>
         </p:txBody>
@@ -2355,53 +2355,53 @@
           <a:lstStyle/>
           <a:p>
             <a:r>
-              <a:t>TRÌNH BÀY (3 phút)</a:t>
-            </a:r>
-          </a:p>
-          <a:p>
-            <a:r>
-              <a:t>• Ba việc cụ thể: đứng vững hai chân, mở vai, giao tiếp mắt luân phiên khắp phòng.</a:t>
-            </a:r>
-          </a:p>
-          <a:p>
-            <a:r>
-              <a:t>• Kỹ thuật dừng: DỪNG 1–2 GIÂY trước ý quan trọng — làm mẫu ngay tại chỗ cho lớp cảm nhận.</a:t>
-            </a:r>
-          </a:p>
-          <a:p>
-            <a:r>
-              <a:t>• Run sợ: nói thật rằng ai cũng run; cách xử lý là chuẩn bị kỹ, đến sớm, hít thở sâu, và tập trung vào THÔNG ĐIỆP chứ không vào bản thân.</a:t>
-            </a:r>
-          </a:p>
-          <a:p>
-            <a:r>
-              <a:t>• Câu hỏi khó: nghe hết → cảm ơn → trả lời ngắn; chưa chắc thì HẸN TRẢ LỜI SAU, không bịa.</a:t>
+              <a:t>DELIVERY (3 minutes)</a:t>
+            </a:r>
+          </a:p>
+          <a:p>
+            <a:r>
+              <a:t>• Three concrete things: stand on both feet, open your shoulders, move your eyes around the whole room in turn.</a:t>
+            </a:r>
+          </a:p>
+          <a:p>
+            <a:r>
+              <a:t>• The pause: STOP FOR 1–2 SECONDS before an important point — demonstrate it on the spot so the class feels it.</a:t>
+            </a:r>
+          </a:p>
+          <a:p>
+            <a:r>
+              <a:t>• Nerves: say honestly that everyone gets nervous; the answer is preparing thoroughly, arriving early, breathing deeply, and focusing on the MESSAGE rather than on yourself.</a:t>
+            </a:r>
+          </a:p>
+          <a:p>
+            <a:r>
+              <a:t>• Hard questions: hear it out → thank them → answer briefly; if you aren't sure, PROMISE AN ANSWER LATER — never invent one.</a:t>
             </a:r>
           </a:p>
           <a:p/>
           <a:p>
             <a:r>
-              <a:t>NÓI ĐỦ Ý (phần đã rút khỏi slide)</a:t>
-            </a:r>
-          </a:p>
-          <a:p>
-            <a:r>
-              <a:t>• Ngôn ngữ cơ thể: di chuyển có chủ đích; không đút túi, không vặn bút.</a:t>
-            </a:r>
-          </a:p>
-          <a:p>
-            <a:r>
-              <a:t>• Giọng nói: thay đổi cả tốc độ lẫn ngữ điệu — khoảng lặng là gia vị của bài nói.</a:t>
-            </a:r>
-          </a:p>
-          <a:p>
-            <a:r>
-              <a:t>• Run sợ: run là BÌNH THƯỜNG; đến sớm làm quen không gian; tập trung vào thông điệp thay vì vào bản thân.</a:t>
-            </a:r>
-          </a:p>
-          <a:p>
-            <a:r>
-              <a:t>• Câu hỏi: chưa chắc thì hẹn trả lời sau — trung thực hơn là đoán bừa.</a:t>
+              <a:t>THE FULL VERSION (moved off the slide)</a:t>
+            </a:r>
+          </a:p>
+          <a:p>
+            <a:r>
+              <a:t>• Body language: move with purpose; hands out of pockets, stop fidgeting with the pen.</a:t>
+            </a:r>
+          </a:p>
+          <a:p>
+            <a:r>
+              <a:t>• Voice: vary both pace and pitch — silence is the seasoning of a talk.</a:t>
+            </a:r>
+          </a:p>
+          <a:p>
+            <a:r>
+              <a:t>• Nerves: being nervous is NORMAL; arrive early and get used to the room; focus on the message instead of on yourself.</a:t>
+            </a:r>
+          </a:p>
+          <a:p>
+            <a:r>
+              <a:t>• Questions: if you aren't sure, promise an answer later — honesty beats guessing.</a:t>
             </a:r>
           </a:p>
         </p:txBody>
@@ -2487,38 +2487,38 @@
           <a:lstStyle/>
           <a:p>
             <a:r>
-              <a:t>5 MỨC ĐỘ NGHE (3 phút)</a:t>
-            </a:r>
-          </a:p>
-          <a:p>
-            <a:r>
-              <a:t>• Đi từ thấp lên cao trên bậc thang.</a:t>
-            </a:r>
-          </a:p>
-          <a:p>
-            <a:r>
-              <a:t>• HỎI THẲNG LỚP: "Trong 30 phút vừa rồi, các bạn đang ở mức mấy?" — cả lớp thường cười, tạo không khí.</a:t>
-            </a:r>
-          </a:p>
-          <a:p>
-            <a:r>
-              <a:t>• Nhấn mức 5 NGHE THẤU CẢM: nghe được cả cảm xúc và nhu cầu đằng sau lời nói.</a:t>
-            </a:r>
-          </a:p>
-          <a:p>
-            <a:r>
-              <a:t>• Kỹ thuật diễn đạt lại: "Nếu em hiểu đúng thì ý anh/chị là…" — cho lớp tập nói câu này.</a:t>
+              <a:t>THE 5 LEVELS OF LISTENING (3 minutes)</a:t>
+            </a:r>
+          </a:p>
+          <a:p>
+            <a:r>
+              <a:t>• Climb the ladder from the bottom up.</a:t>
+            </a:r>
+          </a:p>
+          <a:p>
+            <a:r>
+              <a:t>• ASK THE CLASS STRAIGHT OUT: "For the last 30 minutes, which level have you been on?" — they usually laugh, which loosens the room.</a:t>
+            </a:r>
+          </a:p>
+          <a:p>
+            <a:r>
+              <a:t>• Press level 5, EMPATHIC LISTENING: hearing the feeling and the need behind the words.</a:t>
+            </a:r>
+          </a:p>
+          <a:p>
+            <a:r>
+              <a:t>• The paraphrase: "If I've understood you correctly, you mean…" — have the class practise saying it.</a:t>
             </a:r>
           </a:p>
           <a:p/>
           <a:p>
             <a:r>
-              <a:t>NÓI ĐỦ Ý (phần đã rút khỏi slide)</a:t>
-            </a:r>
-          </a:p>
-          <a:p>
-            <a:r>
-              <a:t>• Lắng nghe chủ động đủ ý: tập trung toàn bộ vào người nói • không ngắt lời, không vội phán xét • ghi chú ý chính • phản hồi bằng ánh mắt, gật đầu • diễn đạt lại để xác nhận: “Nếu em hiểu đúng thì ý anh/chị là…”.</a:t>
+              <a:t>THE FULL VERSION (moved off the slide)</a:t>
+            </a:r>
+          </a:p>
+          <a:p>
+            <a:r>
+              <a:t>• Active listening in full: give the speaker your whole attention • don't interrupt, don't rush to judge • note the main points • respond with your eyes and a nod • paraphrase to confirm: “If I've understood you correctly, you mean…”.</a:t>
             </a:r>
           </a:p>
         </p:txBody>

--- a/slides-en/02-professional-skills.pptx
+++ b/slides-en/02-professional-skills.pptx
@@ -520,10 +520,23 @@
           <a:lstStyle/>
           <a:p>
             <a:r>
-              <a:rPr lang="en-US" dirty="0"/>
-              <a:t/>
-            </a:r>
-            <a:endParaRPr lang="en-US" dirty="0"/>
+              <a:t>OPENING (2 minutes)</a:t>
+            </a:r>
+          </a:p>
+          <a:p>
+            <a:r>
+              <a:t>• One sentence back to the previous chapter: the five-stage model and the five principles.</a:t>
+            </a:r>
+          </a:p>
+          <a:p>
+            <a:r>
+              <a:t>• Go in with a question: "Have you ever judged someone within ten seconds of meeting them?"</a:t>
+            </a:r>
+          </a:p>
+          <a:p>
+            <a:r>
+              <a:t>• Land it: this chapter is four skills you will use every working day of your life.</a:t>
+            </a:r>
           </a:p>
         </p:txBody>
       </p:sp>
@@ -1479,48 +1492,7 @@
           <a:lstStyle/>
           <a:p>
             <a:r>
-              <a:t>THE 4×20 RULE (4 minutes)</a:t>
-            </a:r>
-          </a:p>
-          <a:p>
-            <a:r>
-              <a:t>• Ask before you teach: "How long do you think it takes someone to form an impression of you?"</a:t>
-            </a:r>
-          </a:p>
-          <a:p>
-            <a:r>
-              <a:t>• Walk the four twenties, one short example each.</a:t>
-            </a:r>
-          </a:p>
-          <a:p>
-            <a:r>
-              <a:t>• DEMONSTRATE: walk into the room twice — once head down and hurried, once head up, shoulders open, smiling. Ask the class what changed.</a:t>
-            </a:r>
-          </a:p>
-          <a:p>
-            <a:r>
-              <a:t>• LAND IT: a first impression is PREPARED, not lucky.</a:t>
-            </a:r>
-          </a:p>
-          <a:p/>
-          <a:p>
-            <a:r>
-              <a:t>THE FULL VERSION (moved off the slide)</a:t>
-            </a:r>
-          </a:p>
-          <a:p>
-            <a:r>
-              <a:t>• The first few seconds: the brain forms a judgement almost instantly from appearance, bearing and greeting — and a first impression is very hard to reverse later.</a:t>
-            </a:r>
-          </a:p>
-          <a:p>
-            <a:r>
-              <a:t>• The 4×20 rule in full: the first 20 seconds • the first 20 steps • the 20 cm of your face (eyes, smile) • the first 20 words — prepare all four properly.</a:t>
-            </a:r>
-          </a:p>
-          <a:p>
-            <a:r>
-              <a:t>• Three pillars: dress that fits the setting AND the position; a bearing that is confident and friendly; a greeting and introduction that are clear and correctly formed.</a:t>
+              <a:t>SECTION CHANGE (30 seconds).</a:t>
             </a:r>
           </a:p>
         </p:txBody>
@@ -1912,10 +1884,49 @@
           <a:lstStyle/>
           <a:p>
             <a:r>
-              <a:rPr lang="en-US" dirty="0"/>
-              <a:t/>
-            </a:r>
-            <a:endParaRPr lang="en-US" dirty="0"/>
+              <a:t>THE 4×20 RULE (4 minutes)</a:t>
+            </a:r>
+          </a:p>
+          <a:p>
+            <a:r>
+              <a:t>• Ask before you teach: "How long do you think it takes someone to form an impression of you?"</a:t>
+            </a:r>
+          </a:p>
+          <a:p>
+            <a:r>
+              <a:t>• Walk the four twenties, one short example each.</a:t>
+            </a:r>
+          </a:p>
+          <a:p>
+            <a:r>
+              <a:t>• DEMONSTRATE: walk into the room twice — once head down and hurried, once head up, shoulders open, smiling. Ask the class what changed.</a:t>
+            </a:r>
+          </a:p>
+          <a:p>
+            <a:r>
+              <a:t>• LAND IT: a first impression is PREPARED, not lucky.</a:t>
+            </a:r>
+          </a:p>
+          <a:p/>
+          <a:p>
+            <a:r>
+              <a:t>THE FULL VERSION (moved off the slide)</a:t>
+            </a:r>
+          </a:p>
+          <a:p>
+            <a:r>
+              <a:t>• The first few seconds: the brain forms a judgement almost instantly from appearance, bearing and greeting — and a first impression is very hard to reverse later.</a:t>
+            </a:r>
+          </a:p>
+          <a:p>
+            <a:r>
+              <a:t>• The 4×20 rule in full: the first 20 seconds • the first 20 steps • the 20 cm of your face (eyes, smile) • the first 20 words — prepare all four properly.</a:t>
+            </a:r>
+          </a:p>
+          <a:p>
+            <a:r>
+              <a:t>• Three pillars: dress that fits the setting AND the position; a bearing that is confident and friendly; a greeting and introduction that are clear and correctly formed.</a:t>
+            </a:r>
           </a:p>
         </p:txBody>
       </p:sp>
